--- a/presentations/2026-09_進度報告/10_書面報告.pptx
+++ b/presentations/2026-09_進度報告/10_書面報告.pptx
@@ -7089,12 +7089,12 @@
         </p:nvSpPr>
         <p:spPr>
           <a:xfrm>
-            <a:off x="566928" y="1700784"/>
-            <a:ext cx="5346040" cy="1938528"/>
+            <a:off x="566928" y="1682496"/>
+            <a:ext cx="5346040" cy="1847088"/>
           </a:xfrm>
           <a:prstGeom prst="roundRect">
             <a:avLst>
-              <a:gd name="adj" fmla="val 2830"/>
+              <a:gd name="adj" fmla="val 2970"/>
             </a:avLst>
           </a:prstGeom>
           <a:solidFill>
@@ -7116,7 +7116,7 @@
         </p:nvSpPr>
         <p:spPr>
           <a:xfrm>
-            <a:off x="822960" y="1883664"/>
+            <a:off x="822960" y="1865376"/>
             <a:ext cx="4833976" cy="402336"/>
           </a:xfrm>
           <a:prstGeom prst="rect">
@@ -7155,8 +7155,8 @@
         </p:nvSpPr>
         <p:spPr>
           <a:xfrm>
-            <a:off x="822960" y="2322576"/>
-            <a:ext cx="4833976" cy="1188720"/>
+            <a:off x="822960" y="2286000"/>
+            <a:ext cx="4833976" cy="1133856"/>
           </a:xfrm>
           <a:prstGeom prst="rect">
             <a:avLst/>
@@ -7170,7 +7170,7 @@
           <a:p>
             <a:pPr indent="0" marL="0">
               <a:lnSpc>
-                <a:spcPct val="130000"/>
+                <a:spcPct val="128000"/>
               </a:lnSpc>
               <a:buNone/>
             </a:pPr>
@@ -7183,7 +7183,7 @@
                 <a:ea typeface="Microsoft JhengHei" pitchFamily="34" charset="-122"/>
                 <a:cs typeface="Microsoft JhengHei" pitchFamily="34" charset="-120"/>
               </a:rPr>
-              <a:t>以 text-embedding-3-small 將訊息轉成 1536 維向量，存入 PostgreSQL 的 pgvector 並以 cosine 相似度比對。門檻 0.75 是用實測資料校準出來的：同一謠言的改寫版落在 0.79–0.82，不同謠言不超過 0.68。</a:t>
+              <a:t>以向量模型把訊息轉成 1536 維向量，存入 PostgreSQL 的 pgvector，再以 cosine 相似度比對已證實的資料列。門檻 0.75 是用實測資料校準出來的：同一謠言的改寫版落在 0.79–0.82，不同謠言不超過 0.68。</a:t>
             </a:r>
             <a:endParaRPr lang="en-US" sz="1200" dirty="0"/>
           </a:p>
@@ -7197,12 +7197,12 @@
         </p:nvSpPr>
         <p:spPr>
           <a:xfrm>
-            <a:off x="6278728" y="1700784"/>
-            <a:ext cx="5346040" cy="1938528"/>
+            <a:off x="6278728" y="1682496"/>
+            <a:ext cx="5346040" cy="1847088"/>
           </a:xfrm>
           <a:prstGeom prst="roundRect">
             <a:avLst>
-              <a:gd name="adj" fmla="val 2830"/>
+              <a:gd name="adj" fmla="val 2970"/>
             </a:avLst>
           </a:prstGeom>
           <a:solidFill>
@@ -7224,7 +7224,7 @@
         </p:nvSpPr>
         <p:spPr>
           <a:xfrm>
-            <a:off x="6534760" y="1883664"/>
+            <a:off x="6534760" y="1865376"/>
             <a:ext cx="4833976" cy="402336"/>
           </a:xfrm>
           <a:prstGeom prst="rect">
@@ -7263,8 +7263,8 @@
         </p:nvSpPr>
         <p:spPr>
           <a:xfrm>
-            <a:off x="6534760" y="2322576"/>
-            <a:ext cx="4833976" cy="1188720"/>
+            <a:off x="6534760" y="2286000"/>
+            <a:ext cx="4833976" cy="1133856"/>
           </a:xfrm>
           <a:prstGeom prst="rect">
             <a:avLst/>
@@ -7278,7 +7278,7 @@
           <a:p>
             <a:pPr indent="0" marL="0">
               <a:lnSpc>
-                <a:spcPct val="130000"/>
+                <a:spcPct val="128000"/>
               </a:lnSpc>
               <a:buNone/>
             </a:pPr>
@@ -7305,12 +7305,12 @@
         </p:nvSpPr>
         <p:spPr>
           <a:xfrm>
-            <a:off x="566928" y="3840480"/>
-            <a:ext cx="5346040" cy="1938528"/>
+            <a:off x="566928" y="3730752"/>
+            <a:ext cx="5346040" cy="1847088"/>
           </a:xfrm>
           <a:prstGeom prst="roundRect">
             <a:avLst>
-              <a:gd name="adj" fmla="val 2830"/>
+              <a:gd name="adj" fmla="val 2970"/>
             </a:avLst>
           </a:prstGeom>
           <a:solidFill>
@@ -7332,7 +7332,7 @@
         </p:nvSpPr>
         <p:spPr>
           <a:xfrm>
-            <a:off x="822960" y="4023360"/>
+            <a:off x="822960" y="3913632"/>
             <a:ext cx="4833976" cy="402336"/>
           </a:xfrm>
           <a:prstGeom prst="rect">
@@ -7371,8 +7371,8 @@
         </p:nvSpPr>
         <p:spPr>
           <a:xfrm>
-            <a:off x="822960" y="4462272"/>
-            <a:ext cx="4833976" cy="1188720"/>
+            <a:off x="822960" y="4334256"/>
+            <a:ext cx="4833976" cy="1133856"/>
           </a:xfrm>
           <a:prstGeom prst="rect">
             <a:avLst/>
@@ -7386,7 +7386,7 @@
           <a:p>
             <a:pPr indent="0" marL="0">
               <a:lnSpc>
-                <a:spcPct val="130000"/>
+                <a:spcPct val="128000"/>
               </a:lnSpc>
               <a:buNone/>
             </a:pPr>
@@ -7413,12 +7413,12 @@
         </p:nvSpPr>
         <p:spPr>
           <a:xfrm>
-            <a:off x="6278728" y="3840480"/>
-            <a:ext cx="5346040" cy="1938528"/>
+            <a:off x="6278728" y="3730752"/>
+            <a:ext cx="5346040" cy="1847088"/>
           </a:xfrm>
           <a:prstGeom prst="roundRect">
             <a:avLst>
-              <a:gd name="adj" fmla="val 2830"/>
+              <a:gd name="adj" fmla="val 2970"/>
             </a:avLst>
           </a:prstGeom>
           <a:solidFill>
@@ -7440,7 +7440,7 @@
         </p:nvSpPr>
         <p:spPr>
           <a:xfrm>
-            <a:off x="6534760" y="4023360"/>
+            <a:off x="6534760" y="3913632"/>
             <a:ext cx="4833976" cy="402336"/>
           </a:xfrm>
           <a:prstGeom prst="rect">
@@ -7479,8 +7479,8 @@
         </p:nvSpPr>
         <p:spPr>
           <a:xfrm>
-            <a:off x="6534760" y="4462272"/>
-            <a:ext cx="4833976" cy="1188720"/>
+            <a:off x="6534760" y="4334256"/>
+            <a:ext cx="4833976" cy="1133856"/>
           </a:xfrm>
           <a:prstGeom prst="rect">
             <a:avLst/>
@@ -7494,7 +7494,7 @@
           <a:p>
             <a:pPr indent="0" marL="0">
               <a:lnSpc>
-                <a:spcPct val="130000"/>
+                <a:spcPct val="128000"/>
               </a:lnSpc>
               <a:buNone/>
             </a:pPr>
@@ -7510,6 +7510,142 @@
               <a:t>Vercel 靜態前端同源代理到 Render 的 FastAPI 後端，資料在 Supabase。對外連線一律經 SSRF 防護，另有每日 AI 次數上限、每個 IP 的頻率限制與請求大小上限。</a:t>
             </a:r>
             <a:endParaRPr lang="en-US" sz="1200" dirty="0"/>
+          </a:p>
+        </p:txBody>
+      </p:sp>
+      <p:sp>
+        <p:nvSpPr>
+          <p:cNvPr id="18" name="Shape 16"/>
+          <p:cNvSpPr/>
+          <p:nvPr/>
+        </p:nvSpPr>
+        <p:spPr>
+          <a:xfrm>
+            <a:off x="566928" y="5669280"/>
+            <a:ext cx="11057839" cy="420624"/>
+          </a:xfrm>
+          <a:prstGeom prst="roundRect">
+            <a:avLst>
+              <a:gd name="adj" fmla="val 13043"/>
+            </a:avLst>
+          </a:prstGeom>
+          <a:solidFill>
+            <a:srgbClr val="FFFFFF"/>
+          </a:solidFill>
+          <a:ln w="12700">
+            <a:solidFill>
+              <a:srgbClr val="D4D4D8"/>
+            </a:solidFill>
+            <a:prstDash val="solid"/>
+          </a:ln>
+        </p:spPr>
+      </p:sp>
+      <p:sp>
+        <p:nvSpPr>
+          <p:cNvPr id="19" name="Text 17"/>
+          <p:cNvSpPr txBox="1"/>
+          <p:nvPr/>
+        </p:nvSpPr>
+        <p:spPr>
+          <a:xfrm>
+            <a:off x="804672" y="5669280"/>
+            <a:ext cx="10582351" cy="420624"/>
+          </a:xfrm>
+          <a:prstGeom prst="rect">
+            <a:avLst/>
+          </a:prstGeom>
+          <a:noFill/>
+          <a:ln/>
+        </p:spPr>
+        <p:txBody>
+          <a:bodyPr wrap="square" lIns="0" tIns="0" rIns="0" bIns="0" rtlCol="0" anchor="ctr"/>
+          <a:lstStyle/>
+          <a:p>
+            <a:pPr indent="0" marL="0">
+              <a:buNone/>
+            </a:pPr>
+            <a:r>
+              <a:rPr lang="en-US" sz="1150" b="1" dirty="0">
+                <a:solidFill>
+                  <a:srgbClr val="5B5B66"/>
+                </a:solidFill>
+                <a:latin typeface="Microsoft JhengHei" pitchFamily="34" charset="0"/>
+                <a:ea typeface="Microsoft JhengHei" pitchFamily="34" charset="-122"/>
+                <a:cs typeface="Microsoft JhengHei" pitchFamily="34" charset="-120"/>
+              </a:rPr>
+              <a:t>判讀模型　</a:t>
+            </a:r>
+            <a:pPr indent="0" marL="0">
+              <a:buNone/>
+            </a:pPr>
+            <a:r>
+              <a:rPr lang="en-US" sz="1150" b="1" dirty="0">
+                <a:solidFill>
+                  <a:srgbClr val="111111"/>
+                </a:solidFill>
+                <a:latin typeface="Microsoft JhengHei" pitchFamily="34" charset="0"/>
+                <a:ea typeface="Microsoft JhengHei" pitchFamily="34" charset="-122"/>
+                <a:cs typeface="Microsoft JhengHei" pitchFamily="34" charset="-120"/>
+              </a:rPr>
+              <a:t>gpt-5.4-mini</a:t>
+            </a:r>
+            <a:pPr indent="0" marL="0">
+              <a:buNone/>
+            </a:pPr>
+            <a:r>
+              <a:rPr lang="en-US" sz="1150" dirty="0">
+                <a:solidFill>
+                  <a:srgbClr val="3F3F46"/>
+                </a:solidFill>
+                <a:latin typeface="Microsoft JhengHei" pitchFamily="34" charset="0"/>
+                <a:ea typeface="Microsoft JhengHei" pitchFamily="34" charset="-122"/>
+                <a:cs typeface="Microsoft JhengHei" pitchFamily="34" charset="-120"/>
+              </a:rPr>
+              <a:t>（推理強度 medium）　　</a:t>
+            </a:r>
+            <a:pPr indent="0" marL="0">
+              <a:buNone/>
+            </a:pPr>
+            <a:r>
+              <a:rPr lang="en-US" sz="1150" b="1" dirty="0">
+                <a:solidFill>
+                  <a:srgbClr val="5B5B66"/>
+                </a:solidFill>
+                <a:latin typeface="Microsoft JhengHei" pitchFamily="34" charset="0"/>
+                <a:ea typeface="Microsoft JhengHei" pitchFamily="34" charset="-122"/>
+                <a:cs typeface="Microsoft JhengHei" pitchFamily="34" charset="-120"/>
+              </a:rPr>
+              <a:t>向量模型　</a:t>
+            </a:r>
+            <a:pPr indent="0" marL="0">
+              <a:buNone/>
+            </a:pPr>
+            <a:r>
+              <a:rPr lang="en-US" sz="1150" b="1" dirty="0">
+                <a:solidFill>
+                  <a:srgbClr val="111111"/>
+                </a:solidFill>
+                <a:latin typeface="Microsoft JhengHei" pitchFamily="34" charset="0"/>
+                <a:ea typeface="Microsoft JhengHei" pitchFamily="34" charset="-122"/>
+                <a:cs typeface="Microsoft JhengHei" pitchFamily="34" charset="-120"/>
+              </a:rPr>
+              <a:t>text-embedding-3-small</a:t>
+            </a:r>
+            <a:pPr indent="0" marL="0">
+              <a:buNone/>
+            </a:pPr>
+            <a:r>
+              <a:rPr lang="en-US" sz="1150" dirty="0">
+                <a:solidFill>
+                  <a:srgbClr val="3F3F46"/>
+                </a:solidFill>
+                <a:latin typeface="Microsoft JhengHei" pitchFamily="34" charset="0"/>
+                <a:ea typeface="Microsoft JhengHei" pitchFamily="34" charset="-122"/>
+                <a:cs typeface="Microsoft JhengHei" pitchFamily="34" charset="-120"/>
+              </a:rPr>
+              <a:t>（1536 維）　　兩者皆經長庚 CGU AIR 閘道；語意快取命中時完全不呼叫判讀模型。</a:t>
+            </a:r>
+            <a:endParaRPr lang="en-US" sz="1150" dirty="0"/>
           </a:p>
         </p:txBody>
       </p:sp>
